--- a/GIT.pptx
+++ b/GIT.pptx
@@ -14,9 +14,6 @@
     <p:sldId id="259" r:id="rId8"/>
     <p:sldId id="260" r:id="rId9"/>
     <p:sldId id="265" r:id="rId10"/>
-    <p:sldId id="266" r:id="rId11"/>
-    <p:sldId id="267" r:id="rId12"/>
-    <p:sldId id="261" r:id="rId13"/>
   </p:sldIdLst>
   <p:sldSz cx="12192000" cy="6858000"/>
   <p:notesSz cx="6858000" cy="9144000"/>
@@ -115,6 +112,11 @@
       </a:defRPr>
     </a:lvl9pPr>
   </p:defaultTextStyle>
+  <p:extLst>
+    <p:ext uri="{EFAFB233-063F-42B5-8137-9DF3F51BA10A}">
+      <p15:sldGuideLst xmlns:p15="http://schemas.microsoft.com/office/powerpoint/2012/main"/>
+    </p:ext>
+  </p:extLst>
 </p:presentation>
 </file>
 
@@ -249,7 +251,7 @@
           <a:p>
             <a:fld id="{BE21F566-7323-4A8A-B68F-4DDF1F002BFC}" type="datetimeFigureOut">
               <a:rPr lang="en-IN" smtClean="0"/>
-              <a:t>18-05-2024</a:t>
+              <a:t>14-06-2024</a:t>
             </a:fld>
             <a:endParaRPr lang="en-IN"/>
           </a:p>
@@ -419,7 +421,7 @@
           <a:p>
             <a:fld id="{BE21F566-7323-4A8A-B68F-4DDF1F002BFC}" type="datetimeFigureOut">
               <a:rPr lang="en-IN" smtClean="0"/>
-              <a:t>18-05-2024</a:t>
+              <a:t>14-06-2024</a:t>
             </a:fld>
             <a:endParaRPr lang="en-IN"/>
           </a:p>
@@ -599,7 +601,7 @@
           <a:p>
             <a:fld id="{BE21F566-7323-4A8A-B68F-4DDF1F002BFC}" type="datetimeFigureOut">
               <a:rPr lang="en-IN" smtClean="0"/>
-              <a:t>18-05-2024</a:t>
+              <a:t>14-06-2024</a:t>
             </a:fld>
             <a:endParaRPr lang="en-IN"/>
           </a:p>
@@ -769,7 +771,7 @@
           <a:p>
             <a:fld id="{BE21F566-7323-4A8A-B68F-4DDF1F002BFC}" type="datetimeFigureOut">
               <a:rPr lang="en-IN" smtClean="0"/>
-              <a:t>18-05-2024</a:t>
+              <a:t>14-06-2024</a:t>
             </a:fld>
             <a:endParaRPr lang="en-IN"/>
           </a:p>
@@ -1015,7 +1017,7 @@
           <a:p>
             <a:fld id="{BE21F566-7323-4A8A-B68F-4DDF1F002BFC}" type="datetimeFigureOut">
               <a:rPr lang="en-IN" smtClean="0"/>
-              <a:t>18-05-2024</a:t>
+              <a:t>14-06-2024</a:t>
             </a:fld>
             <a:endParaRPr lang="en-IN"/>
           </a:p>
@@ -1247,7 +1249,7 @@
           <a:p>
             <a:fld id="{BE21F566-7323-4A8A-B68F-4DDF1F002BFC}" type="datetimeFigureOut">
               <a:rPr lang="en-IN" smtClean="0"/>
-              <a:t>18-05-2024</a:t>
+              <a:t>14-06-2024</a:t>
             </a:fld>
             <a:endParaRPr lang="en-IN"/>
           </a:p>
@@ -1614,7 +1616,7 @@
           <a:p>
             <a:fld id="{BE21F566-7323-4A8A-B68F-4DDF1F002BFC}" type="datetimeFigureOut">
               <a:rPr lang="en-IN" smtClean="0"/>
-              <a:t>18-05-2024</a:t>
+              <a:t>14-06-2024</a:t>
             </a:fld>
             <a:endParaRPr lang="en-IN"/>
           </a:p>
@@ -1732,7 +1734,7 @@
           <a:p>
             <a:fld id="{BE21F566-7323-4A8A-B68F-4DDF1F002BFC}" type="datetimeFigureOut">
               <a:rPr lang="en-IN" smtClean="0"/>
-              <a:t>18-05-2024</a:t>
+              <a:t>14-06-2024</a:t>
             </a:fld>
             <a:endParaRPr lang="en-IN"/>
           </a:p>
@@ -1827,7 +1829,7 @@
           <a:p>
             <a:fld id="{BE21F566-7323-4A8A-B68F-4DDF1F002BFC}" type="datetimeFigureOut">
               <a:rPr lang="en-IN" smtClean="0"/>
-              <a:t>18-05-2024</a:t>
+              <a:t>14-06-2024</a:t>
             </a:fld>
             <a:endParaRPr lang="en-IN"/>
           </a:p>
@@ -2104,7 +2106,7 @@
           <a:p>
             <a:fld id="{BE21F566-7323-4A8A-B68F-4DDF1F002BFC}" type="datetimeFigureOut">
               <a:rPr lang="en-IN" smtClean="0"/>
-              <a:t>18-05-2024</a:t>
+              <a:t>14-06-2024</a:t>
             </a:fld>
             <a:endParaRPr lang="en-IN"/>
           </a:p>
@@ -2357,7 +2359,7 @@
           <a:p>
             <a:fld id="{BE21F566-7323-4A8A-B68F-4DDF1F002BFC}" type="datetimeFigureOut">
               <a:rPr lang="en-IN" smtClean="0"/>
-              <a:t>18-05-2024</a:t>
+              <a:t>14-06-2024</a:t>
             </a:fld>
             <a:endParaRPr lang="en-IN"/>
           </a:p>
@@ -2570,7 +2572,7 @@
           <a:p>
             <a:fld id="{BE21F566-7323-4A8A-B68F-4DDF1F002BFC}" type="datetimeFigureOut">
               <a:rPr lang="en-IN" smtClean="0"/>
-              <a:t>18-05-2024</a:t>
+              <a:t>14-06-2024</a:t>
             </a:fld>
             <a:endParaRPr lang="en-IN"/>
           </a:p>
@@ -3129,210 +3131,6 @@
 </p:sld>
 </file>
 
-<file path=ppt/slides/slide10.xml><?xml version="1.0" encoding="utf-8"?>
-<p:sld xmlns:a="http://schemas.openxmlformats.org/drawingml/2006/main" xmlns:r="http://schemas.openxmlformats.org/officeDocument/2006/relationships" xmlns:p="http://schemas.openxmlformats.org/presentationml/2006/main">
-  <p:cSld>
-    <p:spTree>
-      <p:nvGrpSpPr>
-        <p:cNvPr id="1" name=""/>
-        <p:cNvGrpSpPr/>
-        <p:nvPr/>
-      </p:nvGrpSpPr>
-      <p:grpSpPr>
-        <a:xfrm>
-          <a:off x="0" y="0"/>
-          <a:ext cx="0" cy="0"/>
-          <a:chOff x="0" y="0"/>
-          <a:chExt cx="0" cy="0"/>
-        </a:xfrm>
-      </p:grpSpPr>
-      <p:sp>
-        <p:nvSpPr>
-          <p:cNvPr id="2" name="Title 1"/>
-          <p:cNvSpPr>
-            <a:spLocks noGrp="1"/>
-          </p:cNvSpPr>
-          <p:nvPr>
-            <p:ph type="title"/>
-          </p:nvPr>
-        </p:nvSpPr>
-        <p:spPr/>
-        <p:txBody>
-          <a:bodyPr/>
-          <a:lstStyle/>
-          <a:p>
-            <a:endParaRPr lang="en-IN"/>
-          </a:p>
-        </p:txBody>
-      </p:sp>
-      <p:sp>
-        <p:nvSpPr>
-          <p:cNvPr id="3" name="Content Placeholder 2"/>
-          <p:cNvSpPr>
-            <a:spLocks noGrp="1"/>
-          </p:cNvSpPr>
-          <p:nvPr>
-            <p:ph idx="1"/>
-          </p:nvPr>
-        </p:nvSpPr>
-        <p:spPr/>
-        <p:txBody>
-          <a:bodyPr/>
-          <a:lstStyle/>
-          <a:p>
-            <a:endParaRPr lang="en-IN"/>
-          </a:p>
-        </p:txBody>
-      </p:sp>
-    </p:spTree>
-    <p:extLst>
-      <p:ext uri="{BB962C8B-B14F-4D97-AF65-F5344CB8AC3E}">
-        <p14:creationId xmlns:p14="http://schemas.microsoft.com/office/powerpoint/2010/main" val="1706958479"/>
-      </p:ext>
-    </p:extLst>
-  </p:cSld>
-  <p:clrMapOvr>
-    <a:masterClrMapping/>
-  </p:clrMapOvr>
-</p:sld>
-</file>
-
-<file path=ppt/slides/slide11.xml><?xml version="1.0" encoding="utf-8"?>
-<p:sld xmlns:a="http://schemas.openxmlformats.org/drawingml/2006/main" xmlns:r="http://schemas.openxmlformats.org/officeDocument/2006/relationships" xmlns:p="http://schemas.openxmlformats.org/presentationml/2006/main">
-  <p:cSld>
-    <p:spTree>
-      <p:nvGrpSpPr>
-        <p:cNvPr id="1" name=""/>
-        <p:cNvGrpSpPr/>
-        <p:nvPr/>
-      </p:nvGrpSpPr>
-      <p:grpSpPr>
-        <a:xfrm>
-          <a:off x="0" y="0"/>
-          <a:ext cx="0" cy="0"/>
-          <a:chOff x="0" y="0"/>
-          <a:chExt cx="0" cy="0"/>
-        </a:xfrm>
-      </p:grpSpPr>
-      <p:sp>
-        <p:nvSpPr>
-          <p:cNvPr id="2" name="Title 1"/>
-          <p:cNvSpPr>
-            <a:spLocks noGrp="1"/>
-          </p:cNvSpPr>
-          <p:nvPr>
-            <p:ph type="title"/>
-          </p:nvPr>
-        </p:nvSpPr>
-        <p:spPr/>
-        <p:txBody>
-          <a:bodyPr/>
-          <a:lstStyle/>
-          <a:p>
-            <a:endParaRPr lang="en-IN"/>
-          </a:p>
-        </p:txBody>
-      </p:sp>
-      <p:sp>
-        <p:nvSpPr>
-          <p:cNvPr id="3" name="Content Placeholder 2"/>
-          <p:cNvSpPr>
-            <a:spLocks noGrp="1"/>
-          </p:cNvSpPr>
-          <p:nvPr>
-            <p:ph idx="1"/>
-          </p:nvPr>
-        </p:nvSpPr>
-        <p:spPr/>
-        <p:txBody>
-          <a:bodyPr/>
-          <a:lstStyle/>
-          <a:p>
-            <a:endParaRPr lang="en-IN"/>
-          </a:p>
-        </p:txBody>
-      </p:sp>
-    </p:spTree>
-    <p:extLst>
-      <p:ext uri="{BB962C8B-B14F-4D97-AF65-F5344CB8AC3E}">
-        <p14:creationId xmlns:p14="http://schemas.microsoft.com/office/powerpoint/2010/main" val="1870571166"/>
-      </p:ext>
-    </p:extLst>
-  </p:cSld>
-  <p:clrMapOvr>
-    <a:masterClrMapping/>
-  </p:clrMapOvr>
-</p:sld>
-</file>
-
-<file path=ppt/slides/slide12.xml><?xml version="1.0" encoding="utf-8"?>
-<p:sld xmlns:a="http://schemas.openxmlformats.org/drawingml/2006/main" xmlns:r="http://schemas.openxmlformats.org/officeDocument/2006/relationships" xmlns:p="http://schemas.openxmlformats.org/presentationml/2006/main">
-  <p:cSld>
-    <p:spTree>
-      <p:nvGrpSpPr>
-        <p:cNvPr id="1" name=""/>
-        <p:cNvGrpSpPr/>
-        <p:nvPr/>
-      </p:nvGrpSpPr>
-      <p:grpSpPr>
-        <a:xfrm>
-          <a:off x="0" y="0"/>
-          <a:ext cx="0" cy="0"/>
-          <a:chOff x="0" y="0"/>
-          <a:chExt cx="0" cy="0"/>
-        </a:xfrm>
-      </p:grpSpPr>
-      <p:sp>
-        <p:nvSpPr>
-          <p:cNvPr id="2" name="Title 1"/>
-          <p:cNvSpPr>
-            <a:spLocks noGrp="1"/>
-          </p:cNvSpPr>
-          <p:nvPr>
-            <p:ph type="title"/>
-          </p:nvPr>
-        </p:nvSpPr>
-        <p:spPr/>
-        <p:txBody>
-          <a:bodyPr/>
-          <a:lstStyle/>
-          <a:p>
-            <a:endParaRPr lang="en-IN"/>
-          </a:p>
-        </p:txBody>
-      </p:sp>
-      <p:sp>
-        <p:nvSpPr>
-          <p:cNvPr id="3" name="Content Placeholder 2"/>
-          <p:cNvSpPr>
-            <a:spLocks noGrp="1"/>
-          </p:cNvSpPr>
-          <p:nvPr>
-            <p:ph idx="1"/>
-          </p:nvPr>
-        </p:nvSpPr>
-        <p:spPr/>
-        <p:txBody>
-          <a:bodyPr/>
-          <a:lstStyle/>
-          <a:p>
-            <a:endParaRPr lang="en-IN"/>
-          </a:p>
-        </p:txBody>
-      </p:sp>
-    </p:spTree>
-    <p:extLst>
-      <p:ext uri="{BB962C8B-B14F-4D97-AF65-F5344CB8AC3E}">
-        <p14:creationId xmlns:p14="http://schemas.microsoft.com/office/powerpoint/2010/main" val="2525758257"/>
-      </p:ext>
-    </p:extLst>
-  </p:cSld>
-  <p:clrMapOvr>
-    <a:masterClrMapping/>
-  </p:clrMapOvr>
-</p:sld>
-</file>
-
 <file path=ppt/slides/slide2.xml><?xml version="1.0" encoding="utf-8"?>
 <p:sld xmlns:a="http://schemas.openxmlformats.org/drawingml/2006/main" xmlns:r="http://schemas.openxmlformats.org/officeDocument/2006/relationships" xmlns:p="http://schemas.openxmlformats.org/presentationml/2006/main">
   <p:cSld>
